--- a/demo/demo_template 1.pptx
+++ b/demo/demo_template 1.pptx
@@ -18,15 +18,15 @@
   <p:notesSz cx="10287000" cy="18288000"/>
   <p:embeddedFontLst>
     <p:embeddedFont>
-      <p:font typeface="DM Sans Bold" panose="020B0604020202020204" charset="-18"/>
+      <p:font typeface="DM Sans Bold" panose="020B0604020202020204" charset="0"/>
       <p:bold r:id="rId8"/>
     </p:embeddedFont>
     <p:embeddedFont>
-      <p:font typeface="DM Sans Regular" panose="020B0604020202020204" charset="-18"/>
+      <p:font typeface="DM Sans Regular" panose="020B0604020202020204" charset="0"/>
       <p:regular r:id="rId9"/>
     </p:embeddedFont>
     <p:embeddedFont>
-      <p:font typeface="Syne SemiBold" pitchFamily="2" charset="-18"/>
+      <p:font typeface="Syne SemiBold" panose="020B0604020202020204" charset="0"/>
       <p:bold r:id="rId10"/>
     </p:embeddedFont>
   </p:embeddedFontLst>
@@ -1777,7 +1777,7 @@
                 <a:ea typeface="DM Sans Bold" pitchFamily="34" charset="-122"/>
                 <a:cs typeface="DM Sans Bold" pitchFamily="34" charset="-120"/>
               </a:rPr>
-              <a:t>[One sentence goal]</a:t>
+              <a:t>Generates an optimized travel packing list given destination, dates, activities, and forecast</a:t>
             </a:r>
             <a:endParaRPr lang="en-US" sz="2700" dirty="0"/>
           </a:p>
